--- a/classes/parte-6-analisis-de-malware/145-el-formato-pe-de-windows/clase-145-presentacion.pptx
+++ b/classes/parte-6-analisis-de-malware/145-el-formato-pe-de-windows/clase-145-presentacion.pptx
@@ -17,6 +17,9 @@
     <p:sldId id="265" r:id="rId16"/>
     <p:sldId id="266" r:id="rId17"/>
     <p:sldId id="267" r:id="rId18"/>
+    <p:sldId id="268" r:id="rId19"/>
+    <p:sldId id="269" r:id="rId20"/>
+    <p:sldId id="270" r:id="rId21"/>
   </p:sldIdLst>
   <p:sldSz cx="9144000" cy="6858000" type="screen4x3"/>
   <p:notesSz cx="6858000" cy="9144000"/>
@@ -3198,7 +3201,7 @@
                   <a:srgbClr val="0B3D2E"/>
                 </a:solidFill>
               </a:rPr>
-              <a:t>⚠️ Errores comunes</a:t>
+              <a:t>✍️ Ejercicios</a:t>
             </a:r>
           </a:p>
         </p:txBody>
@@ -3236,67 +3239,82 @@
                   <a:srgbClr val="22282E"/>
                 </a:solidFill>
               </a:rPr>
-              <a:t>•  Confundir RVA con offset de disco — Usa la tabla de secciones para traducir; no son iguales</a:t>
-            </a:r>
-          </a:p>
-          <a:p>
-            <a:pPr>
-              <a:spcAft>
-                <a:spcPts val="600"/>
-              </a:spcAft>
-            </a:pPr>
-            <a:r>
-              <a:rPr sz="1500">
-                <a:solidFill>
-                  <a:srgbClr val="22282E"/>
-                </a:solidFill>
-              </a:rPr>
-              <a:t>•  Entry point fuera de .text — Señal de packing; el stub vive en otra sección</a:t>
-            </a:r>
-          </a:p>
-          <a:p>
-            <a:pPr>
-              <a:spcAft>
-                <a:spcPts val="600"/>
-              </a:spcAft>
-            </a:pPr>
-            <a:r>
-              <a:rPr sz="1500">
-                <a:solidFill>
-                  <a:srgbClr val="22282E"/>
-                </a:solidFill>
-              </a:rPr>
-              <a:t>•  IAT casi vacía — Imports resueltos en runtime; espera resolverlos tras desempacar</a:t>
-            </a:r>
-          </a:p>
-          <a:p>
-            <a:pPr>
-              <a:spcAft>
-                <a:spcPts val="600"/>
-              </a:spcAft>
-            </a:pPr>
-            <a:r>
-              <a:rPr sz="1500">
-                <a:solidFill>
-                  <a:srgbClr val="22282E"/>
-                </a:solidFill>
-              </a:rPr>
-              <a:t>•  Ignorar el overlay — Muchos droppers guardan la carga ahí; revísalo siempre</a:t>
-            </a:r>
-          </a:p>
-          <a:p>
-            <a:pPr>
-              <a:spcAft>
-                <a:spcPts val="600"/>
-              </a:spcAft>
-            </a:pPr>
-            <a:r>
-              <a:rPr sz="1500">
-                <a:solidFill>
-                  <a:srgbClr val="22282E"/>
-                </a:solidFill>
-              </a:rPr>
-              <a:t>•  Fiarse del nombre de sección — Es arbitrario; correlaciónalo con permisos y entropía</a:t>
+              <a:t>•  Explica cómo el cargador usa las section headers para mapear el archivo.</a:t>
+            </a:r>
+          </a:p>
+          <a:p>
+            <a:pPr>
+              <a:spcAft>
+                <a:spcPts val="600"/>
+              </a:spcAft>
+            </a:pPr>
+            <a:r>
+              <a:rPr sz="1500">
+                <a:solidFill>
+                  <a:srgbClr val="22282E"/>
+                </a:solidFill>
+              </a:rPr>
+              <a:t>•  Dado un RVA, calcula el raw offset a mano usando la tabla de secciones.</a:t>
+            </a:r>
+          </a:p>
+          <a:p>
+            <a:pPr>
+              <a:spcAft>
+                <a:spcPts val="600"/>
+              </a:spcAft>
+            </a:pPr>
+            <a:r>
+              <a:rPr sz="1500">
+                <a:solidFill>
+                  <a:srgbClr val="22282E"/>
+                </a:solidFill>
+              </a:rPr>
+              <a:t>•  Compara la IAT de un binario normal con la de uno empaquetado.</a:t>
+            </a:r>
+          </a:p>
+          <a:p>
+            <a:pPr>
+              <a:spcAft>
+                <a:spcPts val="600"/>
+              </a:spcAft>
+            </a:pPr>
+            <a:r>
+              <a:rPr sz="1500">
+                <a:solidFill>
+                  <a:srgbClr val="22282E"/>
+                </a:solidFill>
+              </a:rPr>
+              <a:t>•  Identifica 3 nombres de sección típicos de packers conocidos.</a:t>
+            </a:r>
+          </a:p>
+          <a:p>
+            <a:pPr>
+              <a:spcAft>
+                <a:spcPts val="600"/>
+              </a:spcAft>
+            </a:pPr>
+            <a:r>
+              <a:rPr sz="1500">
+                <a:solidFill>
+                  <a:srgbClr val="22282E"/>
+                </a:solidFill>
+              </a:rPr>
+              <a:t>•  Escribe un script pefile que marque secciones con entropía &gt; 7.0.</a:t>
+            </a:r>
+          </a:p>
+          <a:p>
+            <a:pPr>
+              <a:spcAft>
+                <a:spcPts val="600"/>
+              </a:spcAft>
+            </a:pPr>
+            <a:r>
+              <a:rPr sz="1500">
+                <a:solidFill>
+                  <a:srgbClr val="22282E"/>
+                </a:solidFill>
+              </a:rPr>
+              <a:t>•  Investiga cómo se abusa de los TLS callbacks para anti-debug.</a:t>
             </a:r>
           </a:p>
         </p:txBody>
@@ -3347,7 +3365,7 @@
                   <a:srgbClr val="0B3D2E"/>
                 </a:solidFill>
               </a:rPr>
-              <a:t>❓ Preguntas frecuentes</a:t>
+              <a:t>📝 Reto verificable</a:t>
             </a:r>
           </a:p>
         </p:txBody>
@@ -3385,37 +3403,22 @@
                   <a:srgbClr val="22282E"/>
                 </a:solidFill>
               </a:rPr>
-              <a:t>•  ❓ ¿Por qué importa tanto el PE para malware? Porque packing, inyección y persistencia manipulan directamente la estructura PE; entenderla es requisito para desempacar y desensamblar.</a:t>
-            </a:r>
-          </a:p>
-          <a:p>
-            <a:pPr>
-              <a:spcAft>
-                <a:spcPts val="600"/>
-              </a:spcAft>
-            </a:pPr>
-            <a:r>
-              <a:rPr sz="1500">
-                <a:solidFill>
-                  <a:srgbClr val="22282E"/>
-                </a:solidFill>
-              </a:rPr>
-              <a:t>•  ❓ ¿Qué es la ImageBase y por qué cambia? Es la dirección preferida de carga. Con ASLR el binario se reubica y las direcciones reales difieren de las estáticas; por eso trabajamos con RVAs.</a:t>
-            </a:r>
-          </a:p>
-          <a:p>
-            <a:pPr>
-              <a:spcAft>
-                <a:spcPts val="600"/>
-              </a:spcAft>
-            </a:pPr>
-            <a:r>
-              <a:rPr sz="1500">
-                <a:solidFill>
-                  <a:srgbClr val="22282E"/>
-                </a:solidFill>
-              </a:rPr>
-              <a:t>•  ❓ ¿Los .NET usan PE? Sí, pero con un directorio CLR y bytecode gestionado; su análisis usa herramientas como dnSpy, distintas de las de PE nativo.</a:t>
+              <a:t>•  Con pefile, genera un reporte PE automatizado de una muestra: entry point, secciones con entropía, imports por DLL, presencia de overlay y TLS callbacks, y un veredicto de "probable packing"…</a:t>
+            </a:r>
+          </a:p>
+          <a:p>
+            <a:pPr>
+              <a:spcAft>
+                <a:spcPts val="600"/>
+              </a:spcAft>
+            </a:pPr>
+            <a:r>
+              <a:rPr sz="1500">
+                <a:solidFill>
+                  <a:srgbClr val="22282E"/>
+                </a:solidFill>
+              </a:rPr>
+              <a:t>•  Criterio de aceptación: el script corre sobre cualquier PE de entrada y su veredicto de packing coincide con lo que muestra Detect It Easy en al menos dos muestras de prueba.</a:t>
             </a:r>
           </a:p>
         </p:txBody>
@@ -3466,7 +3469,7 @@
                   <a:srgbClr val="0B3D2E"/>
                 </a:solidFill>
               </a:rPr>
-              <a:t>🔗 Referencias</a:t>
+              <a:t>⚠️ Errores comunes</a:t>
             </a:r>
           </a:p>
         </p:txBody>
@@ -3504,6 +3507,274 @@
                   <a:srgbClr val="22282E"/>
                 </a:solidFill>
               </a:rPr>
+              <a:t>•  Confundir RVA con offset de disco — Usa la tabla de secciones para traducir; no son iguales</a:t>
+            </a:r>
+          </a:p>
+          <a:p>
+            <a:pPr>
+              <a:spcAft>
+                <a:spcPts val="600"/>
+              </a:spcAft>
+            </a:pPr>
+            <a:r>
+              <a:rPr sz="1500">
+                <a:solidFill>
+                  <a:srgbClr val="22282E"/>
+                </a:solidFill>
+              </a:rPr>
+              <a:t>•  Entry point fuera de .text — Señal de packing; el stub vive en otra sección</a:t>
+            </a:r>
+          </a:p>
+          <a:p>
+            <a:pPr>
+              <a:spcAft>
+                <a:spcPts val="600"/>
+              </a:spcAft>
+            </a:pPr>
+            <a:r>
+              <a:rPr sz="1500">
+                <a:solidFill>
+                  <a:srgbClr val="22282E"/>
+                </a:solidFill>
+              </a:rPr>
+              <a:t>•  IAT casi vacía — Imports resueltos en runtime; espera resolverlos tras desempacar</a:t>
+            </a:r>
+          </a:p>
+          <a:p>
+            <a:pPr>
+              <a:spcAft>
+                <a:spcPts val="600"/>
+              </a:spcAft>
+            </a:pPr>
+            <a:r>
+              <a:rPr sz="1500">
+                <a:solidFill>
+                  <a:srgbClr val="22282E"/>
+                </a:solidFill>
+              </a:rPr>
+              <a:t>•  Ignorar el overlay — Muchos droppers guardan la carga ahí; revísalo siempre</a:t>
+            </a:r>
+          </a:p>
+          <a:p>
+            <a:pPr>
+              <a:spcAft>
+                <a:spcPts val="600"/>
+              </a:spcAft>
+            </a:pPr>
+            <a:r>
+              <a:rPr sz="1500">
+                <a:solidFill>
+                  <a:srgbClr val="22282E"/>
+                </a:solidFill>
+              </a:rPr>
+              <a:t>•  Fiarse del nombre de sección — Es arbitrario; correlaciónalo con permisos y entropía</a:t>
+            </a:r>
+          </a:p>
+        </p:txBody>
+      </p:sp>
+    </p:spTree>
+  </p:cSld>
+  <p:clrMapOvr>
+    <a:masterClrMapping/>
+  </p:clrMapOvr>
+</p:sld>
+</file>
+
+<file path=ppt/slides/slide13.xml><?xml version="1.0" encoding="utf-8"?>
+<p:sld xmlns:a="http://schemas.openxmlformats.org/drawingml/2006/main" xmlns:p="http://schemas.openxmlformats.org/presentationml/2006/main" xmlns:r="http://schemas.openxmlformats.org/officeDocument/2006/relationships">
+  <p:cSld>
+    <p:spTree>
+      <p:nvGrpSpPr>
+        <p:cNvPr id="1" name=""/>
+        <p:cNvGrpSpPr/>
+        <p:nvPr/>
+      </p:nvGrpSpPr>
+      <p:grpSpPr/>
+      <p:sp>
+        <p:nvSpPr>
+          <p:cNvPr id="2" name="TextBox 1"/>
+          <p:cNvSpPr txBox="1"/>
+          <p:nvPr/>
+        </p:nvSpPr>
+        <p:spPr>
+          <a:xfrm>
+            <a:off x="457200" y="320040"/>
+            <a:ext cx="8229600" cy="822960"/>
+          </a:xfrm>
+          <a:prstGeom prst="rect">
+            <a:avLst/>
+          </a:prstGeom>
+          <a:noFill/>
+        </p:spPr>
+        <p:txBody>
+          <a:bodyPr wrap="square">
+            <a:spAutoFit/>
+          </a:bodyPr>
+          <a:lstStyle/>
+          <a:p>
+            <a:r>
+              <a:rPr sz="2600" b="1">
+                <a:solidFill>
+                  <a:srgbClr val="0B3D2E"/>
+                </a:solidFill>
+              </a:rPr>
+              <a:t>❓ Preguntas frecuentes</a:t>
+            </a:r>
+          </a:p>
+        </p:txBody>
+      </p:sp>
+      <p:sp>
+        <p:nvSpPr>
+          <p:cNvPr id="3" name="TextBox 2"/>
+          <p:cNvSpPr txBox="1"/>
+          <p:nvPr/>
+        </p:nvSpPr>
+        <p:spPr>
+          <a:xfrm>
+            <a:off x="457200" y="1280160"/>
+            <a:ext cx="8229600" cy="4937760"/>
+          </a:xfrm>
+          <a:prstGeom prst="rect">
+            <a:avLst/>
+          </a:prstGeom>
+          <a:noFill/>
+        </p:spPr>
+        <p:txBody>
+          <a:bodyPr wrap="square">
+            <a:spAutoFit/>
+          </a:bodyPr>
+          <a:lstStyle/>
+          <a:p>
+            <a:pPr>
+              <a:spcAft>
+                <a:spcPts val="600"/>
+              </a:spcAft>
+            </a:pPr>
+            <a:r>
+              <a:rPr sz="1500">
+                <a:solidFill>
+                  <a:srgbClr val="22282E"/>
+                </a:solidFill>
+              </a:rPr>
+              <a:t>•  ❓ ¿Por qué importa tanto el PE para malware? Porque packing, inyección y persistencia manipulan directamente la estructura PE; entenderla es requisito para desempacar y desensamblar.</a:t>
+            </a:r>
+          </a:p>
+          <a:p>
+            <a:pPr>
+              <a:spcAft>
+                <a:spcPts val="600"/>
+              </a:spcAft>
+            </a:pPr>
+            <a:r>
+              <a:rPr sz="1500">
+                <a:solidFill>
+                  <a:srgbClr val="22282E"/>
+                </a:solidFill>
+              </a:rPr>
+              <a:t>•  ❓ ¿Qué es la ImageBase y por qué cambia? Es la dirección preferida de carga. Con ASLR el binario se reubica y las direcciones reales difieren de las estáticas; por eso trabajamos con RVAs.</a:t>
+            </a:r>
+          </a:p>
+          <a:p>
+            <a:pPr>
+              <a:spcAft>
+                <a:spcPts val="600"/>
+              </a:spcAft>
+            </a:pPr>
+            <a:r>
+              <a:rPr sz="1500">
+                <a:solidFill>
+                  <a:srgbClr val="22282E"/>
+                </a:solidFill>
+              </a:rPr>
+              <a:t>•  ❓ ¿Los .NET usan PE? Sí, pero con un directorio CLR y bytecode gestionado; su análisis usa herramientas como dnSpy, distintas de las de PE nativo.</a:t>
+            </a:r>
+          </a:p>
+        </p:txBody>
+      </p:sp>
+    </p:spTree>
+  </p:cSld>
+  <p:clrMapOvr>
+    <a:masterClrMapping/>
+  </p:clrMapOvr>
+</p:sld>
+</file>
+
+<file path=ppt/slides/slide14.xml><?xml version="1.0" encoding="utf-8"?>
+<p:sld xmlns:a="http://schemas.openxmlformats.org/drawingml/2006/main" xmlns:p="http://schemas.openxmlformats.org/presentationml/2006/main" xmlns:r="http://schemas.openxmlformats.org/officeDocument/2006/relationships">
+  <p:cSld>
+    <p:spTree>
+      <p:nvGrpSpPr>
+        <p:cNvPr id="1" name=""/>
+        <p:cNvGrpSpPr/>
+        <p:nvPr/>
+      </p:nvGrpSpPr>
+      <p:grpSpPr/>
+      <p:sp>
+        <p:nvSpPr>
+          <p:cNvPr id="2" name="TextBox 1"/>
+          <p:cNvSpPr txBox="1"/>
+          <p:nvPr/>
+        </p:nvSpPr>
+        <p:spPr>
+          <a:xfrm>
+            <a:off x="457200" y="320040"/>
+            <a:ext cx="8229600" cy="822960"/>
+          </a:xfrm>
+          <a:prstGeom prst="rect">
+            <a:avLst/>
+          </a:prstGeom>
+          <a:noFill/>
+        </p:spPr>
+        <p:txBody>
+          <a:bodyPr wrap="square">
+            <a:spAutoFit/>
+          </a:bodyPr>
+          <a:lstStyle/>
+          <a:p>
+            <a:r>
+              <a:rPr sz="2600" b="1">
+                <a:solidFill>
+                  <a:srgbClr val="0B3D2E"/>
+                </a:solidFill>
+              </a:rPr>
+              <a:t>🔗 Referencias</a:t>
+            </a:r>
+          </a:p>
+        </p:txBody>
+      </p:sp>
+      <p:sp>
+        <p:nvSpPr>
+          <p:cNvPr id="3" name="TextBox 2"/>
+          <p:cNvSpPr txBox="1"/>
+          <p:nvPr/>
+        </p:nvSpPr>
+        <p:spPr>
+          <a:xfrm>
+            <a:off x="457200" y="1280160"/>
+            <a:ext cx="8229600" cy="4937760"/>
+          </a:xfrm>
+          <a:prstGeom prst="rect">
+            <a:avLst/>
+          </a:prstGeom>
+          <a:noFill/>
+        </p:spPr>
+        <p:txBody>
+          <a:bodyPr wrap="square">
+            <a:spAutoFit/>
+          </a:bodyPr>
+          <a:lstStyle/>
+          <a:p>
+            <a:pPr>
+              <a:spcAft>
+                <a:spcPts val="600"/>
+              </a:spcAft>
+            </a:pPr>
+            <a:r>
+              <a:rPr sz="1500">
+                <a:solidFill>
+                  <a:srgbClr val="22282E"/>
+                </a:solidFill>
+              </a:rPr>
               <a:t>•  Yosifovich et al., Windows Internals, cap. sobre imagen de procesos.</a:t>
             </a:r>
           </a:p>
@@ -3554,6 +3825,81 @@
           </a:p>
         </p:txBody>
       </p:sp>
+    </p:spTree>
+  </p:cSld>
+  <p:clrMapOvr>
+    <a:masterClrMapping/>
+  </p:clrMapOvr>
+</p:sld>
+</file>
+
+<file path=ppt/slides/slide15.xml><?xml version="1.0" encoding="utf-8"?>
+<p:sld xmlns:a="http://schemas.openxmlformats.org/drawingml/2006/main" xmlns:p="http://schemas.openxmlformats.org/presentationml/2006/main" xmlns:r="http://schemas.openxmlformats.org/officeDocument/2006/relationships">
+  <p:cSld>
+    <p:spTree>
+      <p:nvGrpSpPr>
+        <p:cNvPr id="1" name=""/>
+        <p:cNvGrpSpPr/>
+        <p:nvPr/>
+      </p:nvGrpSpPr>
+      <p:grpSpPr/>
+      <p:sp>
+        <p:nvSpPr>
+          <p:cNvPr id="2" name="TextBox 1"/>
+          <p:cNvSpPr txBox="1"/>
+          <p:nvPr/>
+        </p:nvSpPr>
+        <p:spPr>
+          <a:xfrm>
+            <a:off x="457200" y="274320"/>
+            <a:ext cx="8229600" cy="640080"/>
+          </a:xfrm>
+          <a:prstGeom prst="rect">
+            <a:avLst/>
+          </a:prstGeom>
+          <a:noFill/>
+        </p:spPr>
+        <p:txBody>
+          <a:bodyPr wrap="square">
+            <a:spAutoFit/>
+          </a:bodyPr>
+          <a:lstStyle/>
+          <a:p>
+            <a:r>
+              <a:rPr sz="2200" b="1">
+                <a:solidFill>
+                  <a:srgbClr val="0B3D2E"/>
+                </a:solidFill>
+              </a:rPr>
+              <a:t>Diagrama de la clase</a:t>
+            </a:r>
+          </a:p>
+        </p:txBody>
+      </p:sp>
+      <p:pic>
+        <p:nvPicPr>
+          <p:cNvPr id="3" name="Picture 2" descr="6306a1eed3b50c9d.png"/>
+          <p:cNvPicPr>
+            <a:picLocks noChangeAspect="1"/>
+          </p:cNvPicPr>
+          <p:nvPr/>
+        </p:nvPicPr>
+        <p:blipFill>
+          <a:blip r:embed="rId2"/>
+          <a:stretch>
+            <a:fillRect/>
+          </a:stretch>
+        </p:blipFill>
+        <p:spPr>
+          <a:xfrm>
+            <a:off x="457200" y="1467612"/>
+            <a:ext cx="8229600" cy="4562856"/>
+          </a:xfrm>
+          <a:prstGeom prst="rect">
+            <a:avLst/>
+          </a:prstGeom>
+        </p:spPr>
+      </p:pic>
     </p:spTree>
   </p:cSld>
   <p:clrMapOvr>
@@ -3638,7 +3984,7 @@
                   <a:srgbClr val="22282E"/>
                 </a:solidFill>
               </a:rPr>
-              <a:t>•  Entender el Portable Executable (PE), el formato de los ejecutables y DLLs de Windows, con el detalle que necesita un analista: cómo se organizan las cabeceras y secciones, cómo el cargador mapea el archivo en memoria, cómo se resuelven imports y exports, y qué anomalías delatan malware o packing. Este conocimiento es la base para el desensamblado y el unpacking.</a:t>
+              <a:t>•  Entender el Portable Executable (PE), el formato de los ejecutables y DLLs de Windows, con el detalle que necesita un analista: cómo se organizan las cabeceras y secciones, cómo el cargador mapea el…</a:t>
             </a:r>
           </a:p>
         </p:txBody>
@@ -4032,7 +4378,7 @@
                   <a:srgbClr val="0B3D2E"/>
                 </a:solidFill>
               </a:rPr>
-              <a:t>📖 Definiciones y características</a:t>
+              <a:t>🧠 Explicación en profundidad</a:t>
             </a:r>
           </a:p>
         </p:txBody>
@@ -4070,82 +4416,97 @@
                   <a:srgbClr val="22282E"/>
                 </a:solidFill>
               </a:rPr>
-              <a:t>•  PE: formato de ejecutables/DLL de Windows. Característica clave: mapeo por secciones.</a:t>
-            </a:r>
-          </a:p>
-          <a:p>
-            <a:pPr>
-              <a:spcAft>
-                <a:spcPts val="600"/>
-              </a:spcAft>
-            </a:pPr>
-            <a:r>
-              <a:rPr sz="1500">
-                <a:solidFill>
-                  <a:srgbClr val="22282E"/>
-                </a:solidFill>
-              </a:rPr>
-              <a:t>•  Entry point (AddressOfEntryPoint): primera instrucción ejecutada. Característica clave: en packers, apunta al stub.</a:t>
-            </a:r>
-          </a:p>
-          <a:p>
-            <a:pPr>
-              <a:spcAft>
-                <a:spcPts val="600"/>
-              </a:spcAft>
-            </a:pPr>
-            <a:r>
-              <a:rPr sz="1500">
-                <a:solidFill>
-                  <a:srgbClr val="22282E"/>
-                </a:solidFill>
-              </a:rPr>
-              <a:t>•  RVA: offset relativo a la base de imagen en memoria. Característica clave: ≠ offset en disco.</a:t>
-            </a:r>
-          </a:p>
-          <a:p>
-            <a:pPr>
-              <a:spcAft>
-                <a:spcPts val="600"/>
-              </a:spcAft>
-            </a:pPr>
-            <a:r>
-              <a:rPr sz="1500">
-                <a:solidFill>
-                  <a:srgbClr val="22282E"/>
-                </a:solidFill>
-              </a:rPr>
-              <a:t>•  IAT (Import Address Table): tabla que el cargador rellena con direcciones de APIs. Característica clave: infiere funcionalidad.</a:t>
-            </a:r>
-          </a:p>
-          <a:p>
-            <a:pPr>
-              <a:spcAft>
-                <a:spcPts val="600"/>
-              </a:spcAft>
-            </a:pPr>
-            <a:r>
-              <a:rPr sz="1500">
-                <a:solidFill>
-                  <a:srgbClr val="22282E"/>
-                </a:solidFill>
-              </a:rPr>
-              <a:t>•  Overlay: datos anexos tras la última sección. Característica clave: payload/config incrustado.</a:t>
-            </a:r>
-          </a:p>
-          <a:p>
-            <a:pPr>
-              <a:spcAft>
-                <a:spcPts val="600"/>
-              </a:spcAft>
-            </a:pPr>
-            <a:r>
-              <a:rPr sz="1500">
-                <a:solidFill>
-                  <a:srgbClr val="22282E"/>
-                </a:solidFill>
-              </a:rPr>
-              <a:t>•  TLS callback: función ejecutada antes del entry point. Característica clave: anti-debug/ejecución temprana.</a:t>
+              <a:t>•  El PE (Portable Executable) es el formato de los .exe, .dll, .sys y demás ejecutables de</a:t>
+            </a:r>
+          </a:p>
+          <a:p>
+            <a:pPr>
+              <a:spcAft>
+                <a:spcPts val="600"/>
+              </a:spcAft>
+            </a:pPr>
+            <a:r>
+              <a:rPr sz="1500">
+                <a:solidFill>
+                  <a:srgbClr val="22282E"/>
+                </a:solidFill>
+              </a:rPr>
+              <a:t>•  Windows —el equivalente al ELF de Linux (Clase 130)—. Entender su estructura es</a:t>
+            </a:r>
+          </a:p>
+          <a:p>
+            <a:pPr>
+              <a:spcAft>
+                <a:spcPts val="600"/>
+              </a:spcAft>
+            </a:pPr>
+            <a:r>
+              <a:rPr sz="1500">
+                <a:solidFill>
+                  <a:srgbClr val="22282E"/>
+                </a:solidFill>
+              </a:rPr>
+              <a:t>•  fundamental para el análisis de malware por una razón práctica: el PE guarda muchísima información</a:t>
+            </a:r>
+          </a:p>
+          <a:p>
+            <a:pPr>
+              <a:spcAft>
+                <a:spcPts val="600"/>
+              </a:spcAft>
+            </a:pPr>
+            <a:r>
+              <a:rPr sz="1500">
+                <a:solidFill>
+                  <a:srgbClr val="22282E"/>
+                </a:solidFill>
+              </a:rPr>
+              <a:t>•  sobre el binario en sus cabeceras, y saber leerla revela capacidades, pistas de packing, marcas de</a:t>
+            </a:r>
+          </a:p>
+          <a:p>
+            <a:pPr>
+              <a:spcAft>
+                <a:spcPts val="600"/>
+              </a:spcAft>
+            </a:pPr>
+            <a:r>
+              <a:rPr sz="1500">
+                <a:solidFill>
+                  <a:srgbClr val="22282E"/>
+                </a:solidFill>
+              </a:rPr>
+              <a:t>•  tiempo, y anomalías que delatan manipulación. Además, técnicas avanzadas de malware (inyección,</a:t>
+            </a:r>
+          </a:p>
+          <a:p>
+            <a:pPr>
+              <a:spcAft>
+                <a:spcPts val="600"/>
+              </a:spcAft>
+            </a:pPr>
+            <a:r>
+              <a:rPr sz="1500">
+                <a:solidFill>
+                  <a:srgbClr val="22282E"/>
+                </a:solidFill>
+              </a:rPr>
+              <a:t>•  process hollowing, unpacking) manipulan directamente la estructura PE, así que entenderla es</a:t>
+            </a:r>
+          </a:p>
+          <a:p>
+            <a:pPr>
+              <a:spcAft>
+                <a:spcPts val="600"/>
+              </a:spcAft>
+            </a:pPr>
+            <a:r>
+              <a:rPr sz="1500">
+                <a:solidFill>
+                  <a:srgbClr val="22282E"/>
+                </a:solidFill>
+              </a:rPr>
+              <a:t>•  prerrequisito para reconocerlas.</a:t>
             </a:r>
           </a:p>
         </p:txBody>
@@ -4196,7 +4557,7 @@
                   <a:srgbClr val="0B3D2E"/>
                 </a:solidFill>
               </a:rPr>
-              <a:t>🧰 Herramientas y preparación</a:t>
+              <a:t>📖 Definiciones y características</a:t>
             </a:r>
           </a:p>
         </p:txBody>
@@ -4234,52 +4595,82 @@
                   <a:srgbClr val="22282E"/>
                 </a:solidFill>
               </a:rPr>
-              <a:t>•  PE-bear, CFF Explorer, PEStudio para inspección visual.</a:t>
-            </a:r>
-          </a:p>
-          <a:p>
-            <a:pPr>
-              <a:spcAft>
-                <a:spcPts val="600"/>
-              </a:spcAft>
-            </a:pPr>
-            <a:r>
-              <a:rPr sz="1500">
-                <a:solidFill>
-                  <a:srgbClr val="22282E"/>
-                </a:solidFill>
-              </a:rPr>
-              <a:t>•  pefile (Python) para análisis programático.</a:t>
-            </a:r>
-          </a:p>
-          <a:p>
-            <a:pPr>
-              <a:spcAft>
-                <a:spcPts val="600"/>
-              </a:spcAft>
-            </a:pPr>
-            <a:r>
-              <a:rPr sz="1500">
-                <a:solidFill>
-                  <a:srgbClr val="22282E"/>
-                </a:solidFill>
-              </a:rPr>
-              <a:t>•  Detect It Easy para entropía y detección de compilador/packer.</a:t>
-            </a:r>
-          </a:p>
-          <a:p>
-            <a:pPr>
-              <a:spcAft>
-                <a:spcPts val="600"/>
-              </a:spcAft>
-            </a:pPr>
-            <a:r>
-              <a:rPr sz="1500">
-                <a:solidFill>
-                  <a:srgbClr val="22282E"/>
-                </a:solidFill>
-              </a:rPr>
-              <a:t>•  Ghidra/x64dbg para ver el mapeo en memoria (siguientes clases).</a:t>
+              <a:t>•  PE: formato de ejecutables/DLL de Windows. Característica clave: mapeo por secciones.</a:t>
+            </a:r>
+          </a:p>
+          <a:p>
+            <a:pPr>
+              <a:spcAft>
+                <a:spcPts val="600"/>
+              </a:spcAft>
+            </a:pPr>
+            <a:r>
+              <a:rPr sz="1500">
+                <a:solidFill>
+                  <a:srgbClr val="22282E"/>
+                </a:solidFill>
+              </a:rPr>
+              <a:t>•  Entry point (AddressOfEntryPoint): primera instrucción ejecutada. Característica clave: en packers, apunta al stub.</a:t>
+            </a:r>
+          </a:p>
+          <a:p>
+            <a:pPr>
+              <a:spcAft>
+                <a:spcPts val="600"/>
+              </a:spcAft>
+            </a:pPr>
+            <a:r>
+              <a:rPr sz="1500">
+                <a:solidFill>
+                  <a:srgbClr val="22282E"/>
+                </a:solidFill>
+              </a:rPr>
+              <a:t>•  RVA: offset relativo a la base de imagen en memoria. Característica clave: ≠ offset en disco.</a:t>
+            </a:r>
+          </a:p>
+          <a:p>
+            <a:pPr>
+              <a:spcAft>
+                <a:spcPts val="600"/>
+              </a:spcAft>
+            </a:pPr>
+            <a:r>
+              <a:rPr sz="1500">
+                <a:solidFill>
+                  <a:srgbClr val="22282E"/>
+                </a:solidFill>
+              </a:rPr>
+              <a:t>•  IAT (Import Address Table): tabla que el cargador rellena con direcciones de APIs. Característica clave: infiere funcionalidad.</a:t>
+            </a:r>
+          </a:p>
+          <a:p>
+            <a:pPr>
+              <a:spcAft>
+                <a:spcPts val="600"/>
+              </a:spcAft>
+            </a:pPr>
+            <a:r>
+              <a:rPr sz="1500">
+                <a:solidFill>
+                  <a:srgbClr val="22282E"/>
+                </a:solidFill>
+              </a:rPr>
+              <a:t>•  Overlay: datos anexos tras la última sección. Característica clave: payload/config incrustado.</a:t>
+            </a:r>
+          </a:p>
+          <a:p>
+            <a:pPr>
+              <a:spcAft>
+                <a:spcPts val="600"/>
+              </a:spcAft>
+            </a:pPr>
+            <a:r>
+              <a:rPr sz="1500">
+                <a:solidFill>
+                  <a:srgbClr val="22282E"/>
+                </a:solidFill>
+              </a:rPr>
+              <a:t>•  TLS callback: función ejecutada antes del entry point. Característica clave: anti-debug/ejecución temprana.</a:t>
             </a:r>
           </a:p>
         </p:txBody>
@@ -4330,7 +4721,7 @@
                   <a:srgbClr val="0B3D2E"/>
                 </a:solidFill>
               </a:rPr>
-              <a:t>🧪 Laboratorio guiado</a:t>
+              <a:t>📔 Glosario</a:t>
             </a:r>
           </a:p>
         </p:txBody>
@@ -4368,97 +4759,97 @@
                   <a:srgbClr val="22282E"/>
                 </a:solidFill>
               </a:rPr>
-              <a:t>•  Practica primero con un binario legítimo y luego con una muestra en la VM:</a:t>
-            </a:r>
-          </a:p>
-          <a:p>
-            <a:pPr>
-              <a:spcAft>
-                <a:spcPts val="600"/>
-              </a:spcAft>
-            </a:pPr>
-            <a:r>
-              <a:rPr sz="1500">
-                <a:solidFill>
-                  <a:srgbClr val="22282E"/>
-                </a:solidFill>
-              </a:rPr>
-              <a:t>•  Abre notepad.exe en PE-bear. Localiza la firma MZ, el elfanew y salta a los NT headers.</a:t>
-            </a:r>
-          </a:p>
-          <a:p>
-            <a:pPr>
-              <a:spcAft>
-                <a:spcPts val="600"/>
-              </a:spcAft>
-            </a:pPr>
-            <a:r>
-              <a:rPr sz="1500">
-                <a:solidFill>
-                  <a:srgbClr val="22282E"/>
-                </a:solidFill>
-              </a:rPr>
-              <a:t>•  En Optional Header anota: AddressOfEntryPoint, ImageBase, Subsystem (GUI/CLI) y SizeOfImage.</a:t>
-            </a:r>
-          </a:p>
-          <a:p>
-            <a:pPr>
-              <a:spcAft>
-                <a:spcPts val="600"/>
-              </a:spcAft>
-            </a:pPr>
-            <a:r>
-              <a:rPr sz="1500">
-                <a:solidFill>
-                  <a:srgbClr val="22282E"/>
-                </a:solidFill>
-              </a:rPr>
-              <a:t>•  Recorre la tabla de secciones: nombres, tamaños raw vs virtual, y características (ejecutable/escribible). Observa que .text es RX y .data RW.</a:t>
-            </a:r>
-          </a:p>
-          <a:p>
-            <a:pPr>
-              <a:spcAft>
-                <a:spcPts val="600"/>
-              </a:spcAft>
-            </a:pPr>
-            <a:r>
-              <a:rPr sz="1500">
-                <a:solidFill>
-                  <a:srgbClr val="22282E"/>
-                </a:solidFill>
-              </a:rPr>
-              <a:t>•  Con pefile, imprime imports: for e in pe.DIRECTORYENTRYIMPORT: print(e.dll). Relaciona DLLs con capacidades (ws232.dll → red).</a:t>
-            </a:r>
-          </a:p>
-          <a:p>
-            <a:pPr>
-              <a:spcAft>
-                <a:spcPts val="600"/>
-              </a:spcAft>
-            </a:pPr>
-            <a:r>
-              <a:rPr sz="1500">
-                <a:solidFill>
-                  <a:srgbClr val="22282E"/>
-                </a:solidFill>
-              </a:rPr>
-              <a:t>•  Traduce una RVA a offset de disco con pe.getoffsetfromrva(rva) y verifica con PE-bear.</a:t>
-            </a:r>
-          </a:p>
-          <a:p>
-            <a:pPr>
-              <a:spcAft>
-                <a:spcPts val="600"/>
-              </a:spcAft>
-            </a:pPr>
-            <a:r>
-              <a:rPr sz="1500">
-                <a:solidFill>
-                  <a:srgbClr val="22282E"/>
-                </a:solidFill>
-              </a:rPr>
-              <a:t>•  Ahora abre una muestra empaquetada: observa nombres de sección atípicos (UPX0, .packed), entropía alta y una IAT mínima. Anota estas señales de packing.</a:t>
+              <a:t>•  Término — Definición concisa</a:t>
+            </a:r>
+          </a:p>
+          <a:p>
+            <a:pPr>
+              <a:spcAft>
+                <a:spcPts val="600"/>
+              </a:spcAft>
+            </a:pPr>
+            <a:r>
+              <a:rPr sz="1500">
+                <a:solidFill>
+                  <a:srgbClr val="22282E"/>
+                </a:solidFill>
+              </a:rPr>
+              <a:t>•  PE — Portable Executable; formato de ejecutables de Windows</a:t>
+            </a:r>
+          </a:p>
+          <a:p>
+            <a:pPr>
+              <a:spcAft>
+                <a:spcPts val="600"/>
+              </a:spcAft>
+            </a:pPr>
+            <a:r>
+              <a:rPr sz="1500">
+                <a:solidFill>
+                  <a:srgbClr val="22282E"/>
+                </a:solidFill>
+              </a:rPr>
+              <a:t>•  DOS header / MZ — Cabecera inicial con los bytes mágicos MZ</a:t>
+            </a:r>
+          </a:p>
+          <a:p>
+            <a:pPr>
+              <a:spcAft>
+                <a:spcPts val="600"/>
+              </a:spcAft>
+            </a:pPr>
+            <a:r>
+              <a:rPr sz="1500">
+                <a:solidFill>
+                  <a:srgbClr val="22282E"/>
+                </a:solidFill>
+              </a:rPr>
+              <a:t>•  Stub DOS — Mensaje "cannot be run in DOS mode"</a:t>
+            </a:r>
+          </a:p>
+          <a:p>
+            <a:pPr>
+              <a:spcAft>
+                <a:spcPts val="600"/>
+              </a:spcAft>
+            </a:pPr>
+            <a:r>
+              <a:rPr sz="1500">
+                <a:solidFill>
+                  <a:srgbClr val="22282E"/>
+                </a:solidFill>
+              </a:rPr>
+              <a:t>•  NT headers — File Header + Optional Header; núcleo del PE</a:t>
+            </a:r>
+          </a:p>
+          <a:p>
+            <a:pPr>
+              <a:spcAft>
+                <a:spcPts val="600"/>
+              </a:spcAft>
+            </a:pPr>
+            <a:r>
+              <a:rPr sz="1500">
+                <a:solidFill>
+                  <a:srgbClr val="22282E"/>
+                </a:solidFill>
+              </a:rPr>
+              <a:t>•  File Header — Arquitectura, nº de secciones, marca de tiempo</a:t>
+            </a:r>
+          </a:p>
+          <a:p>
+            <a:pPr>
+              <a:spcAft>
+                <a:spcPts val="600"/>
+              </a:spcAft>
+            </a:pPr>
+            <a:r>
+              <a:rPr sz="1500">
+                <a:solidFill>
+                  <a:srgbClr val="22282E"/>
+                </a:solidFill>
+              </a:rPr>
+              <a:t>•  Optional Header — Entry point, base, subsistema, data directories</a:t>
             </a:r>
           </a:p>
         </p:txBody>
@@ -4509,7 +4900,7 @@
                   <a:srgbClr val="0B3D2E"/>
                 </a:solidFill>
               </a:rPr>
-              <a:t>✍️ Ejercicios</a:t>
+              <a:t>🧰 Herramientas y preparación</a:t>
             </a:r>
           </a:p>
         </p:txBody>
@@ -4547,82 +4938,52 @@
                   <a:srgbClr val="22282E"/>
                 </a:solidFill>
               </a:rPr>
-              <a:t>•  Explica cómo el cargador usa las section headers para mapear el archivo.</a:t>
-            </a:r>
-          </a:p>
-          <a:p>
-            <a:pPr>
-              <a:spcAft>
-                <a:spcPts val="600"/>
-              </a:spcAft>
-            </a:pPr>
-            <a:r>
-              <a:rPr sz="1500">
-                <a:solidFill>
-                  <a:srgbClr val="22282E"/>
-                </a:solidFill>
-              </a:rPr>
-              <a:t>•  Dado un RVA, calcula el raw offset a mano usando la tabla de secciones.</a:t>
-            </a:r>
-          </a:p>
-          <a:p>
-            <a:pPr>
-              <a:spcAft>
-                <a:spcPts val="600"/>
-              </a:spcAft>
-            </a:pPr>
-            <a:r>
-              <a:rPr sz="1500">
-                <a:solidFill>
-                  <a:srgbClr val="22282E"/>
-                </a:solidFill>
-              </a:rPr>
-              <a:t>•  Compara la IAT de un binario normal con la de uno empaquetado.</a:t>
-            </a:r>
-          </a:p>
-          <a:p>
-            <a:pPr>
-              <a:spcAft>
-                <a:spcPts val="600"/>
-              </a:spcAft>
-            </a:pPr>
-            <a:r>
-              <a:rPr sz="1500">
-                <a:solidFill>
-                  <a:srgbClr val="22282E"/>
-                </a:solidFill>
-              </a:rPr>
-              <a:t>•  Identifica 3 nombres de sección típicos de packers conocidos.</a:t>
-            </a:r>
-          </a:p>
-          <a:p>
-            <a:pPr>
-              <a:spcAft>
-                <a:spcPts val="600"/>
-              </a:spcAft>
-            </a:pPr>
-            <a:r>
-              <a:rPr sz="1500">
-                <a:solidFill>
-                  <a:srgbClr val="22282E"/>
-                </a:solidFill>
-              </a:rPr>
-              <a:t>•  Escribe un script pefile que marque secciones con entropía &gt; 7.0.</a:t>
-            </a:r>
-          </a:p>
-          <a:p>
-            <a:pPr>
-              <a:spcAft>
-                <a:spcPts val="600"/>
-              </a:spcAft>
-            </a:pPr>
-            <a:r>
-              <a:rPr sz="1500">
-                <a:solidFill>
-                  <a:srgbClr val="22282E"/>
-                </a:solidFill>
-              </a:rPr>
-              <a:t>•  Investiga cómo se abusa de los TLS callbacks para anti-debug.</a:t>
+              <a:t>•  PE-bear, CFF Explorer, PEStudio para inspección visual.</a:t>
+            </a:r>
+          </a:p>
+          <a:p>
+            <a:pPr>
+              <a:spcAft>
+                <a:spcPts val="600"/>
+              </a:spcAft>
+            </a:pPr>
+            <a:r>
+              <a:rPr sz="1500">
+                <a:solidFill>
+                  <a:srgbClr val="22282E"/>
+                </a:solidFill>
+              </a:rPr>
+              <a:t>•  pefile (Python) para análisis programático.</a:t>
+            </a:r>
+          </a:p>
+          <a:p>
+            <a:pPr>
+              <a:spcAft>
+                <a:spcPts val="600"/>
+              </a:spcAft>
+            </a:pPr>
+            <a:r>
+              <a:rPr sz="1500">
+                <a:solidFill>
+                  <a:srgbClr val="22282E"/>
+                </a:solidFill>
+              </a:rPr>
+              <a:t>•  Detect It Easy para entropía y detección de compilador/packer.</a:t>
+            </a:r>
+          </a:p>
+          <a:p>
+            <a:pPr>
+              <a:spcAft>
+                <a:spcPts val="600"/>
+              </a:spcAft>
+            </a:pPr>
+            <a:r>
+              <a:rPr sz="1500">
+                <a:solidFill>
+                  <a:srgbClr val="22282E"/>
+                </a:solidFill>
+              </a:rPr>
+              <a:t>•  Ghidra/x64dbg para ver el mapeo en memoria (siguientes clases).</a:t>
             </a:r>
           </a:p>
         </p:txBody>
@@ -4673,7 +5034,7 @@
                   <a:srgbClr val="0B3D2E"/>
                 </a:solidFill>
               </a:rPr>
-              <a:t>📝 Reto verificable</a:t>
+              <a:t>🧪 Laboratorio guiado</a:t>
             </a:r>
           </a:p>
         </p:txBody>
@@ -4711,22 +5072,97 @@
                   <a:srgbClr val="22282E"/>
                 </a:solidFill>
               </a:rPr>
-              <a:t>•  Con pefile, genera un reporte PE automatizado de una muestra: entry point, secciones con entropía, imports por DLL, presencia de overlay y TLS callbacks, y un veredicto de "probable packing" justificado.</a:t>
-            </a:r>
-          </a:p>
-          <a:p>
-            <a:pPr>
-              <a:spcAft>
-                <a:spcPts val="600"/>
-              </a:spcAft>
-            </a:pPr>
-            <a:r>
-              <a:rPr sz="1500">
-                <a:solidFill>
-                  <a:srgbClr val="22282E"/>
-                </a:solidFill>
-              </a:rPr>
-              <a:t>•  Criterio de aceptación: el script corre sobre cualquier PE de entrada y su veredicto de packing coincide con lo que muestra Detect It Easy en al menos dos muestras de prueba.</a:t>
+              <a:t>•  Practica primero con un binario legítimo y luego con una muestra en la VM:</a:t>
+            </a:r>
+          </a:p>
+          <a:p>
+            <a:pPr>
+              <a:spcAft>
+                <a:spcPts val="600"/>
+              </a:spcAft>
+            </a:pPr>
+            <a:r>
+              <a:rPr sz="1500">
+                <a:solidFill>
+                  <a:srgbClr val="22282E"/>
+                </a:solidFill>
+              </a:rPr>
+              <a:t>•  Abre notepad.exe en PE-bear. Localiza la firma MZ, el elfanew y salta a los NT headers.</a:t>
+            </a:r>
+          </a:p>
+          <a:p>
+            <a:pPr>
+              <a:spcAft>
+                <a:spcPts val="600"/>
+              </a:spcAft>
+            </a:pPr>
+            <a:r>
+              <a:rPr sz="1500">
+                <a:solidFill>
+                  <a:srgbClr val="22282E"/>
+                </a:solidFill>
+              </a:rPr>
+              <a:t>•  En Optional Header anota: AddressOfEntryPoint, ImageBase, Subsystem (GUI/CLI) y SizeOfImage.</a:t>
+            </a:r>
+          </a:p>
+          <a:p>
+            <a:pPr>
+              <a:spcAft>
+                <a:spcPts val="600"/>
+              </a:spcAft>
+            </a:pPr>
+            <a:r>
+              <a:rPr sz="1500">
+                <a:solidFill>
+                  <a:srgbClr val="22282E"/>
+                </a:solidFill>
+              </a:rPr>
+              <a:t>•  Recorre la tabla de secciones: nombres, tamaños raw vs virtual, y características (ejecutable/escribible). Observa que .text es RX y .data RW.</a:t>
+            </a:r>
+          </a:p>
+          <a:p>
+            <a:pPr>
+              <a:spcAft>
+                <a:spcPts val="600"/>
+              </a:spcAft>
+            </a:pPr>
+            <a:r>
+              <a:rPr sz="1500">
+                <a:solidFill>
+                  <a:srgbClr val="22282E"/>
+                </a:solidFill>
+              </a:rPr>
+              <a:t>•  Con pefile, imprime imports: for e in pe.DIRECTORYENTRYIMPORT: print(e.dll). Relaciona DLLs con capacidades (ws232.dll → red).</a:t>
+            </a:r>
+          </a:p>
+          <a:p>
+            <a:pPr>
+              <a:spcAft>
+                <a:spcPts val="600"/>
+              </a:spcAft>
+            </a:pPr>
+            <a:r>
+              <a:rPr sz="1500">
+                <a:solidFill>
+                  <a:srgbClr val="22282E"/>
+                </a:solidFill>
+              </a:rPr>
+              <a:t>•  Traduce una RVA a offset de disco con pe.getoffsetfromrva(rva) y verifica con PE-bear.</a:t>
+            </a:r>
+          </a:p>
+          <a:p>
+            <a:pPr>
+              <a:spcAft>
+                <a:spcPts val="600"/>
+              </a:spcAft>
+            </a:pPr>
+            <a:r>
+              <a:rPr sz="1500">
+                <a:solidFill>
+                  <a:srgbClr val="22282E"/>
+                </a:solidFill>
+              </a:rPr>
+              <a:t>•  Ahora abre una muestra empaquetada: observa nombres de sección atípicos (UPX0, .packed), entropía alta y una IAT mínima. Anota estas señales de packing.</a:t>
             </a:r>
           </a:p>
         </p:txBody>
